--- a/docs/Perf Test Harness-Overview-2026.pptx
+++ b/docs/Perf Test Harness-Overview-2026.pptx
@@ -260,7 +260,7 @@
           <a:p>
             <a:fld id="{D18AAD14-9C34-4AA5-B94E-6692F6349C36}" type="datetimeFigureOut">
               <a:rPr lang="en-US" smtClean="0"/>
-              <a:t>4/30/2026</a:t>
+              <a:t>5/5/2026</a:t>
             </a:fld>
             <a:endParaRPr lang="en-US"/>
           </a:p>
@@ -24053,8 +24053,8 @@
         </p:nvSpPr>
         <p:spPr>
           <a:xfrm>
-            <a:off x="70416" y="4077000"/>
-            <a:ext cx="7156450" cy="1669222"/>
+            <a:off x="336000" y="4077000"/>
+            <a:ext cx="6890866" cy="1669222"/>
           </a:xfrm>
         </p:spPr>
         <p:txBody>
@@ -24105,8 +24105,8 @@
         </p:blipFill>
         <p:spPr>
           <a:xfrm>
-            <a:off x="8884440" y="5589000"/>
-            <a:ext cx="1212918" cy="1212918"/>
+            <a:off x="9120000" y="5877000"/>
+            <a:ext cx="780918" cy="780918"/>
           </a:xfrm>
           <a:prstGeom prst="rect">
             <a:avLst/>
@@ -24142,6 +24142,72 @@
           <a:xfrm>
             <a:off x="4646220" y="2816749"/>
             <a:ext cx="2261733" cy="2261733"/>
+          </a:xfrm>
+          <a:prstGeom prst="rect">
+            <a:avLst/>
+          </a:prstGeom>
+        </p:spPr>
+      </p:pic>
+      <p:pic>
+        <p:nvPicPr>
+          <p:cNvPr id="3" name="Picture 2">
+            <a:extLst>
+              <a:ext uri="{FF2B5EF4-FFF2-40B4-BE49-F238E27FC236}">
+                <a16:creationId xmlns:a16="http://schemas.microsoft.com/office/drawing/2014/main" id="{24BC35EB-A972-AF83-039B-CAED215D2001}"/>
+              </a:ext>
+            </a:extLst>
+          </p:cNvPr>
+          <p:cNvPicPr>
+            <a:picLocks noChangeAspect="1"/>
+          </p:cNvPicPr>
+          <p:nvPr/>
+        </p:nvPicPr>
+        <p:blipFill>
+          <a:blip r:embed="rId4">
+            <a:extLst>
+              <a:ext uri="{28A0092B-C50C-407E-A947-70E740481C1C}">
+                <a14:useLocalDpi xmlns:a14="http://schemas.microsoft.com/office/drawing/2010/main" val="0"/>
+              </a:ext>
+            </a:extLst>
+          </a:blip>
+          <a:stretch>
+            <a:fillRect/>
+          </a:stretch>
+        </p:blipFill>
+        <p:spPr>
+          <a:xfrm>
+            <a:off x="912000" y="6235108"/>
+            <a:ext cx="1706889" cy="552114"/>
+          </a:xfrm>
+          <a:prstGeom prst="rect">
+            <a:avLst/>
+          </a:prstGeom>
+        </p:spPr>
+      </p:pic>
+      <p:pic>
+        <p:nvPicPr>
+          <p:cNvPr id="6" name="Picture 5" descr="Solace Broker PerfTest Harness logo">
+            <a:extLst>
+              <a:ext uri="{FF2B5EF4-FFF2-40B4-BE49-F238E27FC236}">
+                <a16:creationId xmlns:a16="http://schemas.microsoft.com/office/drawing/2014/main" id="{1E4CE320-80E4-1855-ACD4-99E5B5B0CC03}"/>
+              </a:ext>
+            </a:extLst>
+          </p:cNvPr>
+          <p:cNvPicPr>
+            <a:picLocks noChangeAspect="1"/>
+          </p:cNvPicPr>
+          <p:nvPr/>
+        </p:nvPicPr>
+        <p:blipFill>
+          <a:blip r:embed="rId5"/>
+          <a:stretch>
+            <a:fillRect/>
+          </a:stretch>
+        </p:blipFill>
+        <p:spPr>
+          <a:xfrm>
+            <a:off x="3681473" y="5219832"/>
+            <a:ext cx="780918" cy="780918"/>
           </a:xfrm>
           <a:prstGeom prst="rect">
             <a:avLst/>
@@ -25966,6 +26032,16 @@
               <a:t>Feed into capacity planning and identify potential bottlenecks before they become an issue.</a:t>
             </a:r>
           </a:p>
+          <a:p>
+            <a:pPr marL="342900" indent="-342900">
+              <a:buFont typeface="Arial" panose="020B0604020202020204" pitchFamily="34" charset="0"/>
+              <a:buChar char="•"/>
+            </a:pPr>
+            <a:r>
+              <a:rPr lang="en-GB" dirty="0"/>
+              <a:t>Supports AI tools and skills to be used by an LLM like Claude Code.</a:t>
+            </a:r>
+          </a:p>
         </p:txBody>
       </p:sp>
       <p:sp>
@@ -26274,7 +26350,7 @@
             <a:pPr lvl="1"/>
             <a:r>
               <a:rPr lang="en-US" sz="2000" dirty="0"/>
-              <a:t>Each test needs to be run for a min amount of time to make sure we are not spooling etc.</a:t>
+              <a:t>Each test needs to be run for a min amount of time to make sure we are not using burst credits or spooling etc.</a:t>
             </a:r>
           </a:p>
           <a:p>
@@ -28833,7 +28909,7 @@
             <a:avLst/>
           </a:prstGeom>
           <a:solidFill>
-            <a:srgbClr val="8C8C8C"/>
+            <a:schemeClr val="bg2"/>
           </a:solidFill>
           <a:ln w="9525" cap="flat" cmpd="sng" algn="ctr">
             <a:noFill/>
@@ -28923,7 +28999,7 @@
             <a:avLst/>
           </a:prstGeom>
           <a:solidFill>
-            <a:srgbClr val="8C8C8C"/>
+            <a:schemeClr val="bg2"/>
           </a:solidFill>
           <a:ln w="9525" cap="flat" cmpd="sng" algn="ctr">
             <a:noFill/>
@@ -28992,7 +29068,7 @@
             <a:avLst/>
           </a:prstGeom>
           <a:solidFill>
-            <a:srgbClr val="8C8C8C"/>
+            <a:schemeClr val="bg2"/>
           </a:solidFill>
           <a:ln w="9525" cap="flat" cmpd="sng" algn="ctr">
             <a:noFill/>
@@ -29146,7 +29222,7 @@
               <a:tabLst/>
             </a:pPr>
             <a:r>
-              <a:rPr lang="en-GB" sz="1050" b="1" dirty="0">
+              <a:rPr lang="en-GB" sz="1050" dirty="0">
                 <a:latin typeface="Arial" charset="0"/>
               </a:rPr>
               <a:t>- Calls ansible playbook</a:t>
@@ -29172,7 +29248,7 @@
               <a:tabLst/>
             </a:pPr>
             <a:r>
-              <a:rPr lang="en-GB" sz="1050" b="1" dirty="0">
+              <a:rPr lang="en-GB" sz="1050" dirty="0">
                 <a:latin typeface="Arial" charset="0"/>
               </a:rPr>
               <a:t>- Collects results from all hosts</a:t>
@@ -29198,7 +29274,7 @@
               <a:tabLst/>
             </a:pPr>
             <a:r>
-              <a:rPr kumimoji="0" lang="en-GB" sz="1050" b="1" i="0" u="none" strike="noStrike" cap="none" normalizeH="0" baseline="0" dirty="0">
+              <a:rPr kumimoji="0" lang="en-GB" sz="1050" i="0" u="none" strike="noStrike" cap="none" normalizeH="0" baseline="0" dirty="0">
                 <a:ln>
                   <a:noFill/>
                 </a:ln>
@@ -29375,7 +29451,7 @@
             <a:avLst/>
           </a:prstGeom>
           <a:solidFill>
-            <a:srgbClr val="8C8C8C"/>
+            <a:schemeClr val="bg2"/>
           </a:solidFill>
           <a:ln w="9525" cap="flat" cmpd="sng" algn="ctr">
             <a:noFill/>
@@ -29502,7 +29578,7 @@
               <a:tabLst/>
             </a:pPr>
             <a:r>
-              <a:rPr kumimoji="0" lang="en-GB" sz="1050" b="1" i="0" u="none" strike="noStrike" cap="none" normalizeH="0" baseline="0" dirty="0">
+              <a:rPr kumimoji="0" lang="en-GB" sz="1050" i="0" u="none" strike="noStrike" cap="none" normalizeH="0" baseline="0" dirty="0">
                 <a:ln>
                   <a:noFill/>
                 </a:ln>
@@ -29512,7 +29588,7 @@
               <a:t>- Pushes </a:t>
             </a:r>
             <a:r>
-              <a:rPr kumimoji="0" lang="en-GB" sz="1050" b="1" i="0" u="none" strike="noStrike" cap="none" normalizeH="0" baseline="0" dirty="0" err="1">
+              <a:rPr kumimoji="0" lang="en-GB" sz="1050" i="0" u="none" strike="noStrike" cap="none" normalizeH="0" baseline="0" dirty="0" err="1">
                 <a:ln>
                   <a:noFill/>
                 </a:ln>
@@ -29522,13 +29598,13 @@
               <a:t>s</a:t>
             </a:r>
             <a:r>
-              <a:rPr lang="en-GB" sz="1050" b="1" dirty="0" err="1">
+              <a:rPr lang="en-GB" sz="1050" dirty="0" err="1">
                 <a:latin typeface="Arial" charset="0"/>
               </a:rPr>
               <a:t>dkperf</a:t>
             </a:r>
             <a:r>
-              <a:rPr lang="en-GB" sz="1050" b="1" dirty="0">
+              <a:rPr lang="en-GB" sz="1050" dirty="0">
                 <a:latin typeface="Arial" charset="0"/>
               </a:rPr>
               <a:t> and scripts to pub/sub hosts</a:t>
@@ -29554,31 +29630,31 @@
               <a:tabLst/>
             </a:pPr>
             <a:r>
-              <a:rPr lang="en-GB" sz="1050" b="1" dirty="0">
+              <a:rPr lang="en-GB" sz="1050" dirty="0">
                 <a:latin typeface="Arial" charset="0"/>
               </a:rPr>
               <a:t>- Starts the </a:t>
             </a:r>
             <a:r>
-              <a:rPr lang="en-GB" sz="1050" b="1" dirty="0" err="1">
+              <a:rPr lang="en-GB" sz="1050" dirty="0" err="1">
                 <a:latin typeface="Arial" charset="0"/>
               </a:rPr>
               <a:t>sdk_consumers</a:t>
             </a:r>
             <a:r>
-              <a:rPr lang="en-GB" sz="1050" b="1" dirty="0">
+              <a:rPr lang="en-GB" sz="1050" dirty="0">
                 <a:latin typeface="Arial" charset="0"/>
               </a:rPr>
               <a:t> across all </a:t>
             </a:r>
             <a:r>
-              <a:rPr lang="en-GB" sz="1050" b="1" dirty="0" err="1">
+              <a:rPr lang="en-GB" sz="1050" dirty="0" err="1">
                 <a:latin typeface="Arial" charset="0"/>
               </a:rPr>
               <a:t>subhosts</a:t>
             </a:r>
             <a:r>
-              <a:rPr lang="en-GB" sz="1050" b="1" dirty="0">
+              <a:rPr lang="en-GB" sz="1050" dirty="0">
                 <a:latin typeface="Arial" charset="0"/>
               </a:rPr>
               <a:t> </a:t>
@@ -29604,13 +29680,13 @@
               <a:tabLst/>
             </a:pPr>
             <a:r>
-              <a:rPr lang="en-GB" sz="1050" b="1" dirty="0">
+              <a:rPr lang="en-GB" sz="1050" dirty="0">
                 <a:latin typeface="Arial" charset="0"/>
               </a:rPr>
               <a:t>   with a timer in an </a:t>
             </a:r>
             <a:r>
-              <a:rPr kumimoji="0" lang="en-GB" sz="1050" b="1" i="0" u="none" strike="noStrike" cap="none" normalizeH="0" baseline="0" dirty="0" err="1">
+              <a:rPr kumimoji="0" lang="en-GB" sz="1050" i="0" u="none" strike="noStrike" cap="none" normalizeH="0" baseline="0" dirty="0" err="1">
                 <a:ln>
                   <a:noFill/>
                 </a:ln>
@@ -29620,7 +29696,7 @@
               <a:t>async</a:t>
             </a:r>
             <a:r>
-              <a:rPr kumimoji="0" lang="en-GB" sz="1050" b="1" i="0" u="none" strike="noStrike" cap="none" normalizeH="0" baseline="0" dirty="0">
+              <a:rPr kumimoji="0" lang="en-GB" sz="1050" i="0" u="none" strike="noStrike" cap="none" normalizeH="0" baseline="0" dirty="0">
                 <a:ln>
                   <a:noFill/>
                 </a:ln>
@@ -29650,30 +29726,30 @@
               <a:tabLst/>
             </a:pPr>
             <a:r>
-              <a:rPr lang="en-GB" sz="1050" b="1" dirty="0">
+              <a:rPr lang="en-GB" sz="1050" dirty="0">
                 <a:latin typeface="Arial" charset="0"/>
               </a:rPr>
               <a:t>- Starts the </a:t>
             </a:r>
             <a:r>
-              <a:rPr lang="en-GB" sz="1050" b="1" dirty="0" err="1">
+              <a:rPr lang="en-GB" sz="1050" dirty="0" err="1">
                 <a:latin typeface="Arial" charset="0"/>
               </a:rPr>
               <a:t>sdk_publishers</a:t>
             </a:r>
             <a:r>
-              <a:rPr lang="en-GB" sz="1050" b="1" dirty="0">
+              <a:rPr lang="en-GB" sz="1050" dirty="0">
                 <a:latin typeface="Arial" charset="0"/>
               </a:rPr>
               <a:t> across all </a:t>
             </a:r>
             <a:r>
-              <a:rPr lang="en-GB" sz="1050" b="1" dirty="0" err="1">
+              <a:rPr lang="en-GB" sz="1050" dirty="0" err="1">
                 <a:latin typeface="Arial" charset="0"/>
               </a:rPr>
               <a:t>pubhosts</a:t>
             </a:r>
-            <a:endParaRPr lang="en-GB" sz="1050" b="1" dirty="0">
+            <a:endParaRPr lang="en-GB" sz="1050" dirty="0">
               <a:latin typeface="Arial" charset="0"/>
             </a:endParaRPr>
           </a:p>
@@ -29697,7 +29773,7 @@
               <a:tabLst/>
             </a:pPr>
             <a:r>
-              <a:rPr kumimoji="0" lang="en-GB" sz="1050" b="1" i="0" u="none" strike="noStrike" cap="none" normalizeH="0" baseline="0" dirty="0">
+              <a:rPr kumimoji="0" lang="en-GB" sz="1050" i="0" u="none" strike="noStrike" cap="none" normalizeH="0" baseline="0" dirty="0">
                 <a:ln>
                   <a:noFill/>
                 </a:ln>
@@ -29707,7 +29783,7 @@
               <a:t>   with a timer in an </a:t>
             </a:r>
             <a:r>
-              <a:rPr kumimoji="0" lang="en-GB" sz="1050" b="1" i="0" u="none" strike="noStrike" cap="none" normalizeH="0" baseline="0" dirty="0" err="1">
+              <a:rPr kumimoji="0" lang="en-GB" sz="1050" i="0" u="none" strike="noStrike" cap="none" normalizeH="0" baseline="0" dirty="0" err="1">
                 <a:ln>
                   <a:noFill/>
                 </a:ln>
@@ -29717,7 +29793,7 @@
               <a:t>async</a:t>
             </a:r>
             <a:r>
-              <a:rPr kumimoji="0" lang="en-GB" sz="1050" b="1" i="0" u="none" strike="noStrike" cap="none" normalizeH="0" baseline="0" dirty="0">
+              <a:rPr kumimoji="0" lang="en-GB" sz="1050" i="0" u="none" strike="noStrike" cap="none" normalizeH="0" baseline="0" dirty="0">
                 <a:ln>
                   <a:noFill/>
                 </a:ln>
@@ -29747,13 +29823,13 @@
               <a:tabLst/>
             </a:pPr>
             <a:r>
-              <a:rPr lang="en-GB" sz="1050" b="1" dirty="0">
+              <a:rPr lang="en-GB" sz="1050" dirty="0">
                 <a:latin typeface="Arial" charset="0"/>
               </a:rPr>
               <a:t>   </a:t>
             </a:r>
             <a:r>
-              <a:rPr kumimoji="0" lang="en-GB" sz="1050" b="1" i="0" u="none" strike="noStrike" cap="none" normalizeH="0" baseline="0" dirty="0">
+              <a:rPr kumimoji="0" lang="en-GB" sz="1050" i="0" u="none" strike="noStrike" cap="none" normalizeH="0" baseline="0" dirty="0">
                 <a:ln>
                   <a:noFill/>
                 </a:ln>
@@ -29763,7 +29839,7 @@
               <a:t>(each host get a portion of the target </a:t>
             </a:r>
             <a:r>
-              <a:rPr kumimoji="0" lang="en-GB" sz="1050" b="1" i="0" u="none" strike="noStrike" cap="none" normalizeH="0" baseline="0" dirty="0" err="1">
+              <a:rPr kumimoji="0" lang="en-GB" sz="1050" i="0" u="none" strike="noStrike" cap="none" normalizeH="0" baseline="0" dirty="0" err="1">
                 <a:ln>
                   <a:noFill/>
                 </a:ln>
@@ -29772,7 +29848,7 @@
               </a:rPr>
               <a:t>msg</a:t>
             </a:r>
-            <a:endParaRPr kumimoji="0" lang="en-GB" sz="1050" b="1" i="0" u="none" strike="noStrike" cap="none" normalizeH="0" baseline="0" dirty="0">
+            <a:endParaRPr kumimoji="0" lang="en-GB" sz="1050" i="0" u="none" strike="noStrike" cap="none" normalizeH="0" baseline="0" dirty="0">
               <a:ln>
                 <a:noFill/>
               </a:ln>
@@ -29800,12 +29876,12 @@
               <a:tabLst/>
             </a:pPr>
             <a:r>
-              <a:rPr lang="en-GB" sz="1050" b="1" dirty="0">
+              <a:rPr lang="en-GB" sz="1050" dirty="0">
                 <a:latin typeface="Arial" charset="0"/>
               </a:rPr>
               <a:t>    rate assigned = overall / no of hosts)</a:t>
             </a:r>
-            <a:endParaRPr kumimoji="0" lang="en-GB" sz="1050" b="1" i="0" u="none" strike="noStrike" cap="none" normalizeH="0" baseline="0" dirty="0">
+            <a:endParaRPr kumimoji="0" lang="en-GB" sz="1050" i="0" u="none" strike="noStrike" cap="none" normalizeH="0" baseline="0" dirty="0">
               <a:ln>
                 <a:noFill/>
               </a:ln>
@@ -29833,7 +29909,7 @@
               <a:tabLst/>
             </a:pPr>
             <a:r>
-              <a:rPr lang="en-GB" sz="1050" b="1" dirty="0">
+              <a:rPr lang="en-GB" sz="1050" dirty="0">
                 <a:latin typeface="Arial" charset="0"/>
               </a:rPr>
               <a:t>- Collects the output of all publisher and</a:t>
@@ -29859,7 +29935,7 @@
               <a:tabLst/>
             </a:pPr>
             <a:r>
-              <a:rPr kumimoji="0" lang="en-GB" sz="1050" b="1" i="0" u="none" strike="noStrike" cap="none" normalizeH="0" baseline="0" dirty="0">
+              <a:rPr kumimoji="0" lang="en-GB" sz="1050" i="0" u="none" strike="noStrike" cap="none" normalizeH="0" baseline="0" dirty="0">
                 <a:ln>
                   <a:noFill/>
                 </a:ln>
@@ -29892,7 +29968,7 @@
             <a:avLst/>
           </a:prstGeom>
           <a:solidFill>
-            <a:srgbClr val="8C8C8C"/>
+            <a:schemeClr val="bg2"/>
           </a:solidFill>
           <a:ln w="9525" cap="flat" cmpd="sng" algn="ctr">
             <a:noFill/>
@@ -29984,19 +30060,19 @@
               <a:tabLst/>
             </a:pPr>
             <a:r>
-              <a:rPr lang="en-GB" sz="1050" b="1" dirty="0">
+              <a:rPr lang="en-GB" sz="1050" dirty="0">
                 <a:latin typeface="Arial" charset="0"/>
               </a:rPr>
               <a:t>- Starts number of requested </a:t>
             </a:r>
             <a:r>
-              <a:rPr lang="en-GB" sz="1050" b="1" dirty="0" err="1">
+              <a:rPr lang="en-GB" sz="1050" dirty="0" err="1">
                 <a:latin typeface="Arial" charset="0"/>
               </a:rPr>
               <a:t>sdkperf</a:t>
             </a:r>
             <a:r>
-              <a:rPr lang="en-GB" sz="1050" b="1" dirty="0">
+              <a:rPr lang="en-GB" sz="1050" dirty="0">
                 <a:latin typeface="Arial" charset="0"/>
               </a:rPr>
               <a:t> consumers and pins them to</a:t>
@@ -30022,7 +30098,7 @@
               <a:tabLst/>
             </a:pPr>
             <a:r>
-              <a:rPr kumimoji="0" lang="en-GB" sz="1050" b="1" i="0" u="none" strike="noStrike" cap="none" normalizeH="0" baseline="0" dirty="0">
+              <a:rPr kumimoji="0" lang="en-GB" sz="1050" i="0" u="none" strike="noStrike" cap="none" normalizeH="0" baseline="0" dirty="0">
                 <a:ln>
                   <a:noFill/>
                 </a:ln>
@@ -30052,7 +30128,7 @@
               <a:tabLst/>
             </a:pPr>
             <a:r>
-              <a:rPr lang="en-GB" sz="1050" b="1" dirty="0">
+              <a:rPr lang="en-GB" sz="1050" dirty="0">
                 <a:latin typeface="Arial" charset="0"/>
               </a:rPr>
               <a:t>- Waits for timer to expire or Control-C, which is then caught to</a:t>
@@ -30078,7 +30154,7 @@
               <a:tabLst/>
             </a:pPr>
             <a:r>
-              <a:rPr kumimoji="0" lang="en-GB" sz="1050" b="1" i="0" u="none" strike="noStrike" cap="none" normalizeH="0" baseline="0" dirty="0">
+              <a:rPr kumimoji="0" lang="en-GB" sz="1050" i="0" u="none" strike="noStrike" cap="none" normalizeH="0" baseline="0" dirty="0">
                 <a:ln>
                   <a:noFill/>
                 </a:ln>
@@ -30088,7 +30164,7 @@
               <a:t>   gracefully kill the </a:t>
             </a:r>
             <a:r>
-              <a:rPr kumimoji="0" lang="en-GB" sz="1050" b="1" i="0" u="none" strike="noStrike" cap="none" normalizeH="0" baseline="0" dirty="0" err="1">
+              <a:rPr kumimoji="0" lang="en-GB" sz="1050" i="0" u="none" strike="noStrike" cap="none" normalizeH="0" baseline="0" dirty="0" err="1">
                 <a:ln>
                   <a:noFill/>
                 </a:ln>
@@ -30098,7 +30174,7 @@
               <a:t>sdkperf</a:t>
             </a:r>
             <a:r>
-              <a:rPr kumimoji="0" lang="en-GB" sz="1050" b="1" i="0" u="none" strike="noStrike" cap="none" normalizeH="0" baseline="0" dirty="0">
+              <a:rPr kumimoji="0" lang="en-GB" sz="1050" i="0" u="none" strike="noStrike" cap="none" normalizeH="0" baseline="0" dirty="0">
                 <a:ln>
                   <a:noFill/>
                 </a:ln>
@@ -30128,7 +30204,7 @@
               <a:tabLst/>
             </a:pPr>
             <a:r>
-              <a:rPr lang="en-GB" sz="1050" b="1" dirty="0">
+              <a:rPr lang="en-GB" sz="1050" dirty="0">
                 <a:latin typeface="Arial" charset="0"/>
               </a:rPr>
               <a:t>   written</a:t>
@@ -30154,24 +30230,24 @@
               <a:tabLst/>
             </a:pPr>
             <a:r>
-              <a:rPr lang="en-GB" sz="1050" b="1" dirty="0">
+              <a:rPr lang="en-GB" sz="1050" dirty="0">
                 <a:latin typeface="Arial" charset="0"/>
               </a:rPr>
               <a:t>- Collects the results for each </a:t>
             </a:r>
             <a:r>
-              <a:rPr lang="en-GB" sz="1050" b="1" dirty="0" err="1">
+              <a:rPr lang="en-GB" sz="1050" dirty="0" err="1">
                 <a:latin typeface="Arial" charset="0"/>
               </a:rPr>
               <a:t>sdkperf</a:t>
             </a:r>
             <a:r>
-              <a:rPr lang="en-GB" sz="1050" b="1" dirty="0">
+              <a:rPr lang="en-GB" sz="1050" dirty="0">
                 <a:latin typeface="Arial" charset="0"/>
               </a:rPr>
               <a:t> job and calculates sum </a:t>
             </a:r>
-            <a:endParaRPr kumimoji="0" lang="en-GB" sz="1050" b="1" i="0" u="none" strike="noStrike" cap="none" normalizeH="0" baseline="0" dirty="0">
+            <a:endParaRPr kumimoji="0" lang="en-GB" sz="1050" i="0" u="none" strike="noStrike" cap="none" normalizeH="0" baseline="0" dirty="0">
               <a:ln>
                 <a:noFill/>
               </a:ln>
@@ -30202,7 +30278,7 @@
             <a:avLst/>
           </a:prstGeom>
           <a:solidFill>
-            <a:srgbClr val="8C8C8C"/>
+            <a:schemeClr val="bg2"/>
           </a:solidFill>
           <a:ln w="9525" cap="flat" cmpd="sng" algn="ctr">
             <a:noFill/>
@@ -30294,19 +30370,19 @@
               <a:tabLst/>
             </a:pPr>
             <a:r>
-              <a:rPr lang="en-GB" sz="1050" b="1" dirty="0">
+              <a:rPr lang="en-GB" sz="1050" dirty="0">
                 <a:latin typeface="Arial" charset="0"/>
               </a:rPr>
               <a:t>- Starts number of requested </a:t>
             </a:r>
             <a:r>
-              <a:rPr lang="en-GB" sz="1050" b="1" dirty="0" err="1">
+              <a:rPr lang="en-GB" sz="1050" dirty="0" err="1">
                 <a:latin typeface="Arial" charset="0"/>
               </a:rPr>
               <a:t>sdkperf</a:t>
             </a:r>
             <a:r>
-              <a:rPr lang="en-GB" sz="1050" b="1" dirty="0">
+              <a:rPr lang="en-GB" sz="1050" dirty="0">
                 <a:latin typeface="Arial" charset="0"/>
               </a:rPr>
               <a:t> publishers and pins them to</a:t>
@@ -30332,7 +30408,7 @@
               <a:tabLst/>
             </a:pPr>
             <a:r>
-              <a:rPr kumimoji="0" lang="en-GB" sz="1050" b="1" i="0" u="none" strike="noStrike" cap="none" normalizeH="0" baseline="0" dirty="0">
+              <a:rPr kumimoji="0" lang="en-GB" sz="1050" i="0" u="none" strike="noStrike" cap="none" normalizeH="0" baseline="0" dirty="0">
                 <a:ln>
                   <a:noFill/>
                 </a:ln>
@@ -30342,7 +30418,7 @@
               <a:t>   cores in background (each with a portion of the host target </a:t>
             </a:r>
             <a:r>
-              <a:rPr kumimoji="0" lang="en-GB" sz="1050" b="1" i="0" u="none" strike="noStrike" cap="none" normalizeH="0" baseline="0" dirty="0" err="1">
+              <a:rPr kumimoji="0" lang="en-GB" sz="1050" i="0" u="none" strike="noStrike" cap="none" normalizeH="0" baseline="0" dirty="0" err="1">
                 <a:ln>
                   <a:noFill/>
                 </a:ln>
@@ -30352,7 +30428,7 @@
               <a:t>msg</a:t>
             </a:r>
             <a:r>
-              <a:rPr kumimoji="0" lang="en-GB" sz="1050" b="1" i="0" u="none" strike="noStrike" cap="none" normalizeH="0" baseline="0" dirty="0">
+              <a:rPr kumimoji="0" lang="en-GB" sz="1050" i="0" u="none" strike="noStrike" cap="none" normalizeH="0" baseline="0" dirty="0">
                 <a:ln>
                   <a:noFill/>
                 </a:ln>
@@ -30382,12 +30458,12 @@
               <a:tabLst/>
             </a:pPr>
             <a:r>
-              <a:rPr lang="en-GB" sz="1050" b="1" dirty="0">
+              <a:rPr lang="en-GB" sz="1050" dirty="0">
                 <a:latin typeface="Arial" charset="0"/>
               </a:rPr>
               <a:t>   rate = host rate / no of publishers)</a:t>
             </a:r>
-            <a:endParaRPr kumimoji="0" lang="en-GB" sz="1050" b="1" i="0" u="none" strike="noStrike" cap="none" normalizeH="0" baseline="0" dirty="0">
+            <a:endParaRPr kumimoji="0" lang="en-GB" sz="1050" i="0" u="none" strike="noStrike" cap="none" normalizeH="0" baseline="0" dirty="0">
               <a:ln>
                 <a:noFill/>
               </a:ln>
@@ -30415,7 +30491,7 @@
               <a:tabLst/>
             </a:pPr>
             <a:r>
-              <a:rPr lang="en-GB" sz="1050" b="1" dirty="0">
+              <a:rPr lang="en-GB" sz="1050" dirty="0">
                 <a:latin typeface="Arial" charset="0"/>
               </a:rPr>
               <a:t>- Waits for timer to expire or Control-C, which is then caught to</a:t>
@@ -30441,7 +30517,7 @@
               <a:tabLst/>
             </a:pPr>
             <a:r>
-              <a:rPr kumimoji="0" lang="en-GB" sz="1050" b="1" i="0" u="none" strike="noStrike" cap="none" normalizeH="0" baseline="0" dirty="0">
+              <a:rPr kumimoji="0" lang="en-GB" sz="1050" i="0" u="none" strike="noStrike" cap="none" normalizeH="0" baseline="0" dirty="0">
                 <a:ln>
                   <a:noFill/>
                 </a:ln>
@@ -30451,7 +30527,7 @@
               <a:t>   gracefully kill the </a:t>
             </a:r>
             <a:r>
-              <a:rPr kumimoji="0" lang="en-GB" sz="1050" b="1" i="0" u="none" strike="noStrike" cap="none" normalizeH="0" baseline="0" dirty="0" err="1">
+              <a:rPr kumimoji="0" lang="en-GB" sz="1050" i="0" u="none" strike="noStrike" cap="none" normalizeH="0" baseline="0" dirty="0" err="1">
                 <a:ln>
                   <a:noFill/>
                 </a:ln>
@@ -30461,7 +30537,7 @@
               <a:t>sdkperf</a:t>
             </a:r>
             <a:r>
-              <a:rPr kumimoji="0" lang="en-GB" sz="1050" b="1" i="0" u="none" strike="noStrike" cap="none" normalizeH="0" baseline="0" dirty="0">
+              <a:rPr kumimoji="0" lang="en-GB" sz="1050" i="0" u="none" strike="noStrike" cap="none" normalizeH="0" baseline="0" dirty="0">
                 <a:ln>
                   <a:noFill/>
                 </a:ln>
@@ -30491,7 +30567,7 @@
               <a:tabLst/>
             </a:pPr>
             <a:r>
-              <a:rPr lang="en-GB" sz="1050" b="1" dirty="0">
+              <a:rPr lang="en-GB" sz="1050" dirty="0">
                 <a:latin typeface="Arial" charset="0"/>
               </a:rPr>
               <a:t>   written</a:t>
@@ -30517,24 +30593,24 @@
               <a:tabLst/>
             </a:pPr>
             <a:r>
-              <a:rPr lang="en-GB" sz="1050" b="1" dirty="0">
+              <a:rPr lang="en-GB" sz="1050" dirty="0">
                 <a:latin typeface="Arial" charset="0"/>
               </a:rPr>
               <a:t>- Collects the results for each </a:t>
             </a:r>
             <a:r>
-              <a:rPr lang="en-GB" sz="1050" b="1" dirty="0" err="1">
+              <a:rPr lang="en-GB" sz="1050" dirty="0" err="1">
                 <a:latin typeface="Arial" charset="0"/>
               </a:rPr>
               <a:t>sdkperf</a:t>
             </a:r>
             <a:r>
-              <a:rPr lang="en-GB" sz="1050" b="1" dirty="0">
+              <a:rPr lang="en-GB" sz="1050" dirty="0">
                 <a:latin typeface="Arial" charset="0"/>
               </a:rPr>
               <a:t> job and calculates sum </a:t>
             </a:r>
-            <a:endParaRPr kumimoji="0" lang="en-GB" sz="1050" b="1" i="0" u="none" strike="noStrike" cap="none" normalizeH="0" baseline="0" dirty="0">
+            <a:endParaRPr kumimoji="0" lang="en-GB" sz="1050" i="0" u="none" strike="noStrike" cap="none" normalizeH="0" baseline="0" dirty="0">
               <a:ln>
                 <a:noFill/>
               </a:ln>
@@ -31744,6 +31820,15 @@
 </file>
 
 <file path=customXml/item2.xml><?xml version="1.0" encoding="utf-8"?>
+<?mso-contentType ?>
+<FormTemplates xmlns="http://schemas.microsoft.com/sharepoint/v3/contenttype/forms">
+  <Display>DocumentLibraryForm</Display>
+  <Edit>DocumentLibraryForm</Edit>
+  <New>DocumentLibraryForm</New>
+</FormTemplates>
+</file>
+
+<file path=customXml/item3.xml><?xml version="1.0" encoding="utf-8"?>
 <ct:contentTypeSchema xmlns:ct="http://schemas.microsoft.com/office/2006/metadata/contentType" xmlns:ma="http://schemas.microsoft.com/office/2006/metadata/properties/metaAttributes" ct:_="" ma:_="" ma:contentTypeName="Document" ma:contentTypeID="0x010100DBA59E3993B10E4CAD93B4C6B6AB4338" ma:contentTypeVersion="18" ma:contentTypeDescription="Create a new document." ma:contentTypeScope="" ma:versionID="b1c352a0e645668a65a42d6a36924e0e">
   <xsd:schema xmlns:xsd="http://www.w3.org/2001/XMLSchema" xmlns:xs="http://www.w3.org/2001/XMLSchema" xmlns:p="http://schemas.microsoft.com/office/2006/metadata/properties" xmlns:ns2="b9684263-5219-44dc-8ace-9e9cf51448b5" xmlns:ns3="c50c4712-2507-4635-8d96-ac0f8ed1146c" targetNamespace="http://schemas.microsoft.com/office/2006/metadata/properties" ma:root="true" ma:fieldsID="0ebac1cb52d4c4ca9196d097ceac5630" ns2:_="" ns3:_="">
     <xsd:import namespace="b9684263-5219-44dc-8ace-9e9cf51448b5"/>
@@ -31998,15 +32083,6 @@
 </ct:contentTypeSchema>
 </file>
 
-<file path=customXml/item3.xml><?xml version="1.0" encoding="utf-8"?>
-<?mso-contentType ?>
-<FormTemplates xmlns="http://schemas.microsoft.com/sharepoint/v3/contenttype/forms">
-  <Display>DocumentLibraryForm</Display>
-  <Edit>DocumentLibraryForm</Edit>
-  <New>DocumentLibraryForm</New>
-</FormTemplates>
-</file>
-
 <file path=customXml/itemProps1.xml><?xml version="1.0" encoding="utf-8"?>
 <ds:datastoreItem xmlns:ds="http://schemas.openxmlformats.org/officeDocument/2006/customXml" ds:itemID="{33471C70-1727-4A93-A528-B2FB0F1E4E8F}">
   <ds:schemaRefs>
@@ -32025,6 +32101,14 @@
 </file>
 
 <file path=customXml/itemProps2.xml><?xml version="1.0" encoding="utf-8"?>
+<ds:datastoreItem xmlns:ds="http://schemas.openxmlformats.org/officeDocument/2006/customXml" ds:itemID="{79AF0659-183A-43C2-AA7B-C08381F298CB}">
+  <ds:schemaRefs>
+    <ds:schemaRef ds:uri="http://schemas.microsoft.com/sharepoint/v3/contenttype/forms"/>
+  </ds:schemaRefs>
+</ds:datastoreItem>
+</file>
+
+<file path=customXml/itemProps3.xml><?xml version="1.0" encoding="utf-8"?>
 <ds:datastoreItem xmlns:ds="http://schemas.openxmlformats.org/officeDocument/2006/customXml" ds:itemID="{C5590A90-ABCF-443C-A154-8FE4DFA404C4}">
   <ds:schemaRefs>
     <ds:schemaRef ds:uri="http://schemas.microsoft.com/office/2006/metadata/contentType"/>
@@ -32041,12 +32125,4 @@
     <ds:schemaRef ds:uri="http://schemas.microsoft.com/internal/obd"/>
   </ds:schemaRefs>
 </ds:datastoreItem>
-</file>
-
-<file path=customXml/itemProps3.xml><?xml version="1.0" encoding="utf-8"?>
-<ds:datastoreItem xmlns:ds="http://schemas.openxmlformats.org/officeDocument/2006/customXml" ds:itemID="{79AF0659-183A-43C2-AA7B-C08381F298CB}">
-  <ds:schemaRefs>
-    <ds:schemaRef ds:uri="http://schemas.microsoft.com/sharepoint/v3/contenttype/forms"/>
-  </ds:schemaRefs>
-</ds:datastoreItem>
 </file>
--- a/docs/Perf Test Harness-Overview-2026.pptx
+++ b/docs/Perf Test Harness-Overview-2026.pptx
@@ -260,7 +260,7 @@
           <a:p>
             <a:fld id="{D18AAD14-9C34-4AA5-B94E-6692F6349C36}" type="datetimeFigureOut">
               <a:rPr lang="en-US" smtClean="0"/>
-              <a:t>5/5/2026</a:t>
+              <a:t>5/26/2026</a:t>
             </a:fld>
             <a:endParaRPr lang="en-US"/>
           </a:p>
@@ -28138,6 +28138,78 @@
           </a:p>
         </p:txBody>
       </p:sp>
+      <p:sp>
+        <p:nvSpPr>
+          <p:cNvPr id="3" name="TextBox 2">
+            <a:extLst>
+              <a:ext uri="{FF2B5EF4-FFF2-40B4-BE49-F238E27FC236}">
+                <a16:creationId xmlns:a16="http://schemas.microsoft.com/office/drawing/2014/main" id="{7C22E9C6-96EF-69E3-6D58-2ED0D45D5DE2}"/>
+              </a:ext>
+            </a:extLst>
+          </p:cNvPr>
+          <p:cNvSpPr txBox="1"/>
+          <p:nvPr/>
+        </p:nvSpPr>
+        <p:spPr>
+          <a:xfrm>
+            <a:off x="6600000" y="1076716"/>
+            <a:ext cx="388938" cy="161043"/>
+          </a:xfrm>
+          <a:prstGeom prst="rect">
+            <a:avLst/>
+          </a:prstGeom>
+          <a:noFill/>
+        </p:spPr>
+        <p:txBody>
+          <a:bodyPr wrap="square" lIns="0" tIns="0" rIns="0" bIns="0" rtlCol="0">
+            <a:noAutofit/>
+          </a:bodyPr>
+          <a:lstStyle/>
+          <a:p>
+            <a:pPr algn="l"/>
+            <a:r>
+              <a:rPr lang="en-GB" sz="1600" dirty="0"/>
+              <a:t>SSH</a:t>
+            </a:r>
+          </a:p>
+        </p:txBody>
+      </p:sp>
+      <p:sp>
+        <p:nvSpPr>
+          <p:cNvPr id="4" name="TextBox 3">
+            <a:extLst>
+              <a:ext uri="{FF2B5EF4-FFF2-40B4-BE49-F238E27FC236}">
+                <a16:creationId xmlns:a16="http://schemas.microsoft.com/office/drawing/2014/main" id="{7247D29F-8495-2BBC-B37B-3CEF1215021A}"/>
+              </a:ext>
+            </a:extLst>
+          </p:cNvPr>
+          <p:cNvSpPr txBox="1"/>
+          <p:nvPr/>
+        </p:nvSpPr>
+        <p:spPr>
+          <a:xfrm>
+            <a:off x="9109474" y="1403919"/>
+            <a:ext cx="442526" cy="153082"/>
+          </a:xfrm>
+          <a:prstGeom prst="rect">
+            <a:avLst/>
+          </a:prstGeom>
+          <a:noFill/>
+        </p:spPr>
+        <p:txBody>
+          <a:bodyPr wrap="square" lIns="0" tIns="0" rIns="0" bIns="0" rtlCol="0">
+            <a:noAutofit/>
+          </a:bodyPr>
+          <a:lstStyle/>
+          <a:p>
+            <a:pPr algn="l"/>
+            <a:r>
+              <a:rPr lang="en-GB" sz="1600" dirty="0"/>
+              <a:t>SMF</a:t>
+            </a:r>
+          </a:p>
+        </p:txBody>
+      </p:sp>
     </p:spTree>
     <p:extLst>
       <p:ext uri="{BB962C8B-B14F-4D97-AF65-F5344CB8AC3E}">
@@ -31820,15 +31892,6 @@
 </file>
 
 <file path=customXml/item2.xml><?xml version="1.0" encoding="utf-8"?>
-<?mso-contentType ?>
-<FormTemplates xmlns="http://schemas.microsoft.com/sharepoint/v3/contenttype/forms">
-  <Display>DocumentLibraryForm</Display>
-  <Edit>DocumentLibraryForm</Edit>
-  <New>DocumentLibraryForm</New>
-</FormTemplates>
-</file>
-
-<file path=customXml/item3.xml><?xml version="1.0" encoding="utf-8"?>
 <ct:contentTypeSchema xmlns:ct="http://schemas.microsoft.com/office/2006/metadata/contentType" xmlns:ma="http://schemas.microsoft.com/office/2006/metadata/properties/metaAttributes" ct:_="" ma:_="" ma:contentTypeName="Document" ma:contentTypeID="0x010100DBA59E3993B10E4CAD93B4C6B6AB4338" ma:contentTypeVersion="18" ma:contentTypeDescription="Create a new document." ma:contentTypeScope="" ma:versionID="b1c352a0e645668a65a42d6a36924e0e">
   <xsd:schema xmlns:xsd="http://www.w3.org/2001/XMLSchema" xmlns:xs="http://www.w3.org/2001/XMLSchema" xmlns:p="http://schemas.microsoft.com/office/2006/metadata/properties" xmlns:ns2="b9684263-5219-44dc-8ace-9e9cf51448b5" xmlns:ns3="c50c4712-2507-4635-8d96-ac0f8ed1146c" targetNamespace="http://schemas.microsoft.com/office/2006/metadata/properties" ma:root="true" ma:fieldsID="0ebac1cb52d4c4ca9196d097ceac5630" ns2:_="" ns3:_="">
     <xsd:import namespace="b9684263-5219-44dc-8ace-9e9cf51448b5"/>
@@ -32083,6 +32146,15 @@
 </ct:contentTypeSchema>
 </file>
 
+<file path=customXml/item3.xml><?xml version="1.0" encoding="utf-8"?>
+<?mso-contentType ?>
+<FormTemplates xmlns="http://schemas.microsoft.com/sharepoint/v3/contenttype/forms">
+  <Display>DocumentLibraryForm</Display>
+  <Edit>DocumentLibraryForm</Edit>
+  <New>DocumentLibraryForm</New>
+</FormTemplates>
+</file>
+
 <file path=customXml/itemProps1.xml><?xml version="1.0" encoding="utf-8"?>
 <ds:datastoreItem xmlns:ds="http://schemas.openxmlformats.org/officeDocument/2006/customXml" ds:itemID="{33471C70-1727-4A93-A528-B2FB0F1E4E8F}">
   <ds:schemaRefs>
@@ -32101,14 +32173,6 @@
 </file>
 
 <file path=customXml/itemProps2.xml><?xml version="1.0" encoding="utf-8"?>
-<ds:datastoreItem xmlns:ds="http://schemas.openxmlformats.org/officeDocument/2006/customXml" ds:itemID="{79AF0659-183A-43C2-AA7B-C08381F298CB}">
-  <ds:schemaRefs>
-    <ds:schemaRef ds:uri="http://schemas.microsoft.com/sharepoint/v3/contenttype/forms"/>
-  </ds:schemaRefs>
-</ds:datastoreItem>
-</file>
-
-<file path=customXml/itemProps3.xml><?xml version="1.0" encoding="utf-8"?>
 <ds:datastoreItem xmlns:ds="http://schemas.openxmlformats.org/officeDocument/2006/customXml" ds:itemID="{C5590A90-ABCF-443C-A154-8FE4DFA404C4}">
   <ds:schemaRefs>
     <ds:schemaRef ds:uri="http://schemas.microsoft.com/office/2006/metadata/contentType"/>
@@ -32125,4 +32189,12 @@
     <ds:schemaRef ds:uri="http://schemas.microsoft.com/internal/obd"/>
   </ds:schemaRefs>
 </ds:datastoreItem>
+</file>
+
+<file path=customXml/itemProps3.xml><?xml version="1.0" encoding="utf-8"?>
+<ds:datastoreItem xmlns:ds="http://schemas.openxmlformats.org/officeDocument/2006/customXml" ds:itemID="{79AF0659-183A-43C2-AA7B-C08381F298CB}">
+  <ds:schemaRefs>
+    <ds:schemaRef ds:uri="http://schemas.microsoft.com/sharepoint/v3/contenttype/forms"/>
+  </ds:schemaRefs>
+</ds:datastoreItem>
 </file>